--- a/docs/Capstone_Presentation.pptx
+++ b/docs/Capstone_Presentation.pptx
@@ -5,18 +5,18 @@
     <p:sldMasterId id="2147483648" r:id="rId1"/>
   </p:sldMasterIdLst>
   <p:sldIdLst>
-    <p:sldId id="256" r:id="rId7"/>
-    <p:sldId id="257" r:id="rId8"/>
-    <p:sldId id="258" r:id="rId9"/>
-    <p:sldId id="259" r:id="rId10"/>
-    <p:sldId id="260" r:id="rId11"/>
-    <p:sldId id="261" r:id="rId12"/>
-    <p:sldId id="262" r:id="rId13"/>
-    <p:sldId id="263" r:id="rId14"/>
-    <p:sldId id="264" r:id="rId15"/>
-    <p:sldId id="265" r:id="rId16"/>
+    <p:sldId id="256" r:id="rId2"/>
+    <p:sldId id="257" r:id="rId3"/>
+    <p:sldId id="258" r:id="rId4"/>
+    <p:sldId id="259" r:id="rId5"/>
+    <p:sldId id="260" r:id="rId6"/>
+    <p:sldId id="261" r:id="rId7"/>
+    <p:sldId id="262" r:id="rId8"/>
+    <p:sldId id="263" r:id="rId9"/>
+    <p:sldId id="264" r:id="rId10"/>
+    <p:sldId id="265" r:id="rId11"/>
   </p:sldIdLst>
-  <p:sldSz cx="12191695" cy="6858000" type="screen4x3"/>
+  <p:sldSz cx="12192000" cy="6858000"/>
   <p:notesSz cx="6858000" cy="9144000"/>
   <p:defaultTextStyle>
     <a:defPPr>
@@ -113,6 +113,22 @@
       </a:defRPr>
     </a:lvl9pPr>
   </p:defaultTextStyle>
+  <p:extLst>
+    <p:ext uri="{EFAFB233-063F-42B5-8137-9DF3F51BA10A}">
+      <p15:sldGuideLst xmlns:p15="http://schemas.microsoft.com/office/powerpoint/2012/main">
+        <p15:guide id="1" orient="horz" pos="2160">
+          <p15:clr>
+            <a:srgbClr val="A4A3A4"/>
+          </p15:clr>
+        </p15:guide>
+        <p15:guide id="2" pos="2880">
+          <p15:clr>
+            <a:srgbClr val="A4A3A4"/>
+          </p15:clr>
+        </p15:guide>
+      </p15:sldGuideLst>
+    </p:ext>
+  </p:extLst>
 </p:presentation>
 </file>
 
@@ -154,10 +170,9 @@
           <a:lstStyle/>
           <a:p>
             <a:r>
-              <a:rPr lang="en-US" smtClean="0"/>
+              <a:rPr lang="en-US"/>
               <a:t>Click to edit Master title style</a:t>
             </a:r>
-            <a:endParaRPr lang="en-US"/>
           </a:p>
         </p:txBody>
       </p:sp>
@@ -273,10 +288,9 @@
           </a:lstStyle>
           <a:p>
             <a:r>
-              <a:rPr lang="en-US" smtClean="0"/>
+              <a:rPr lang="en-US"/>
               <a:t>Click to edit Master subtitle style</a:t>
             </a:r>
-            <a:endParaRPr lang="en-US"/>
           </a:p>
         </p:txBody>
       </p:sp>
@@ -297,7 +311,7 @@
           <a:p>
             <a:fld id="{5BCAD085-E8A6-8845-BD4E-CB4CCA059FC4}" type="datetimeFigureOut">
               <a:rPr lang="en-US" smtClean="0"/>
-              <a:t>1/27/13</a:t>
+              <a:t>7/10/26</a:t>
             </a:fld>
             <a:endParaRPr lang="en-US"/>
           </a:p>
@@ -391,10 +405,9 @@
           <a:lstStyle/>
           <a:p>
             <a:r>
-              <a:rPr lang="en-US" smtClean="0"/>
+              <a:rPr lang="en-US"/>
               <a:t>Click to edit Master title style</a:t>
             </a:r>
-            <a:endParaRPr lang="en-US"/>
           </a:p>
         </p:txBody>
       </p:sp>
@@ -415,38 +428,37 @@
           <a:p>
             <a:pPr lvl="0"/>
             <a:r>
-              <a:rPr lang="en-US" smtClean="0"/>
+              <a:rPr lang="en-US"/>
               <a:t>Click to edit Master text styles</a:t>
             </a:r>
           </a:p>
           <a:p>
             <a:pPr lvl="1"/>
             <a:r>
-              <a:rPr lang="en-US" smtClean="0"/>
+              <a:rPr lang="en-US"/>
               <a:t>Second level</a:t>
             </a:r>
           </a:p>
           <a:p>
             <a:pPr lvl="2"/>
             <a:r>
-              <a:rPr lang="en-US" smtClean="0"/>
+              <a:rPr lang="en-US"/>
               <a:t>Third level</a:t>
             </a:r>
           </a:p>
           <a:p>
             <a:pPr lvl="3"/>
             <a:r>
-              <a:rPr lang="en-US" smtClean="0"/>
+              <a:rPr lang="en-US"/>
               <a:t>Fourth level</a:t>
             </a:r>
           </a:p>
           <a:p>
             <a:pPr lvl="4"/>
             <a:r>
-              <a:rPr lang="en-US" smtClean="0"/>
+              <a:rPr lang="en-US"/>
               <a:t>Fifth level</a:t>
             </a:r>
-            <a:endParaRPr lang="en-US"/>
           </a:p>
         </p:txBody>
       </p:sp>
@@ -467,7 +479,7 @@
           <a:p>
             <a:fld id="{5BCAD085-E8A6-8845-BD4E-CB4CCA059FC4}" type="datetimeFigureOut">
               <a:rPr lang="en-US" smtClean="0"/>
-              <a:t>1/27/13</a:t>
+              <a:t>7/10/26</a:t>
             </a:fld>
             <a:endParaRPr lang="en-US"/>
           </a:p>
@@ -566,10 +578,9 @@
           <a:lstStyle/>
           <a:p>
             <a:r>
-              <a:rPr lang="en-US" smtClean="0"/>
+              <a:rPr lang="en-US"/>
               <a:t>Click to edit Master title style</a:t>
             </a:r>
-            <a:endParaRPr lang="en-US"/>
           </a:p>
         </p:txBody>
       </p:sp>
@@ -595,38 +606,37 @@
           <a:p>
             <a:pPr lvl="0"/>
             <a:r>
-              <a:rPr lang="en-US" smtClean="0"/>
+              <a:rPr lang="en-US"/>
               <a:t>Click to edit Master text styles</a:t>
             </a:r>
           </a:p>
           <a:p>
             <a:pPr lvl="1"/>
             <a:r>
-              <a:rPr lang="en-US" smtClean="0"/>
+              <a:rPr lang="en-US"/>
               <a:t>Second level</a:t>
             </a:r>
           </a:p>
           <a:p>
             <a:pPr lvl="2"/>
             <a:r>
-              <a:rPr lang="en-US" smtClean="0"/>
+              <a:rPr lang="en-US"/>
               <a:t>Third level</a:t>
             </a:r>
           </a:p>
           <a:p>
             <a:pPr lvl="3"/>
             <a:r>
-              <a:rPr lang="en-US" smtClean="0"/>
+              <a:rPr lang="en-US"/>
               <a:t>Fourth level</a:t>
             </a:r>
           </a:p>
           <a:p>
             <a:pPr lvl="4"/>
             <a:r>
-              <a:rPr lang="en-US" smtClean="0"/>
+              <a:rPr lang="en-US"/>
               <a:t>Fifth level</a:t>
             </a:r>
-            <a:endParaRPr lang="en-US"/>
           </a:p>
         </p:txBody>
       </p:sp>
@@ -647,7 +657,7 @@
           <a:p>
             <a:fld id="{5BCAD085-E8A6-8845-BD4E-CB4CCA059FC4}" type="datetimeFigureOut">
               <a:rPr lang="en-US" smtClean="0"/>
-              <a:t>1/27/13</a:t>
+              <a:t>7/10/26</a:t>
             </a:fld>
             <a:endParaRPr lang="en-US"/>
           </a:p>
@@ -741,10 +751,9 @@
           <a:lstStyle/>
           <a:p>
             <a:r>
-              <a:rPr lang="en-US" smtClean="0"/>
+              <a:rPr lang="en-US"/>
               <a:t>Click to edit Master title style</a:t>
             </a:r>
-            <a:endParaRPr lang="en-US"/>
           </a:p>
         </p:txBody>
       </p:sp>
@@ -765,38 +774,37 @@
           <a:p>
             <a:pPr lvl="0"/>
             <a:r>
-              <a:rPr lang="en-US" smtClean="0"/>
+              <a:rPr lang="en-US"/>
               <a:t>Click to edit Master text styles</a:t>
             </a:r>
           </a:p>
           <a:p>
             <a:pPr lvl="1"/>
             <a:r>
-              <a:rPr lang="en-US" smtClean="0"/>
+              <a:rPr lang="en-US"/>
               <a:t>Second level</a:t>
             </a:r>
           </a:p>
           <a:p>
             <a:pPr lvl="2"/>
             <a:r>
-              <a:rPr lang="en-US" smtClean="0"/>
+              <a:rPr lang="en-US"/>
               <a:t>Third level</a:t>
             </a:r>
           </a:p>
           <a:p>
             <a:pPr lvl="3"/>
             <a:r>
-              <a:rPr lang="en-US" smtClean="0"/>
+              <a:rPr lang="en-US"/>
               <a:t>Fourth level</a:t>
             </a:r>
           </a:p>
           <a:p>
             <a:pPr lvl="4"/>
             <a:r>
-              <a:rPr lang="en-US" smtClean="0"/>
+              <a:rPr lang="en-US"/>
               <a:t>Fifth level</a:t>
             </a:r>
-            <a:endParaRPr lang="en-US"/>
           </a:p>
         </p:txBody>
       </p:sp>
@@ -817,7 +825,7 @@
           <a:p>
             <a:fld id="{5BCAD085-E8A6-8845-BD4E-CB4CCA059FC4}" type="datetimeFigureOut">
               <a:rPr lang="en-US" smtClean="0"/>
-              <a:t>1/27/13</a:t>
+              <a:t>7/10/26</a:t>
             </a:fld>
             <a:endParaRPr lang="en-US"/>
           </a:p>
@@ -920,10 +928,9 @@
           </a:lstStyle>
           <a:p>
             <a:r>
-              <a:rPr lang="en-US" smtClean="0"/>
+              <a:rPr lang="en-US"/>
               <a:t>Click to edit Master title style</a:t>
             </a:r>
-            <a:endParaRPr lang="en-US"/>
           </a:p>
         </p:txBody>
       </p:sp>
@@ -1040,7 +1047,7 @@
           <a:p>
             <a:pPr lvl="0"/>
             <a:r>
-              <a:rPr lang="en-US" smtClean="0"/>
+              <a:rPr lang="en-US"/>
               <a:t>Click to edit Master text styles</a:t>
             </a:r>
           </a:p>
@@ -1063,7 +1070,7 @@
           <a:p>
             <a:fld id="{5BCAD085-E8A6-8845-BD4E-CB4CCA059FC4}" type="datetimeFigureOut">
               <a:rPr lang="en-US" smtClean="0"/>
-              <a:t>1/27/13</a:t>
+              <a:t>7/10/26</a:t>
             </a:fld>
             <a:endParaRPr lang="en-US"/>
           </a:p>
@@ -1157,10 +1164,9 @@
           <a:lstStyle/>
           <a:p>
             <a:r>
-              <a:rPr lang="en-US" smtClean="0"/>
+              <a:rPr lang="en-US"/>
               <a:t>Click to edit Master title style</a:t>
             </a:r>
-            <a:endParaRPr lang="en-US"/>
           </a:p>
         </p:txBody>
       </p:sp>
@@ -1214,38 +1220,37 @@
           <a:p>
             <a:pPr lvl="0"/>
             <a:r>
-              <a:rPr lang="en-US" smtClean="0"/>
+              <a:rPr lang="en-US"/>
               <a:t>Click to edit Master text styles</a:t>
             </a:r>
           </a:p>
           <a:p>
             <a:pPr lvl="1"/>
             <a:r>
-              <a:rPr lang="en-US" smtClean="0"/>
+              <a:rPr lang="en-US"/>
               <a:t>Second level</a:t>
             </a:r>
           </a:p>
           <a:p>
             <a:pPr lvl="2"/>
             <a:r>
-              <a:rPr lang="en-US" smtClean="0"/>
+              <a:rPr lang="en-US"/>
               <a:t>Third level</a:t>
             </a:r>
           </a:p>
           <a:p>
             <a:pPr lvl="3"/>
             <a:r>
-              <a:rPr lang="en-US" smtClean="0"/>
+              <a:rPr lang="en-US"/>
               <a:t>Fourth level</a:t>
             </a:r>
           </a:p>
           <a:p>
             <a:pPr lvl="4"/>
             <a:r>
-              <a:rPr lang="en-US" smtClean="0"/>
+              <a:rPr lang="en-US"/>
               <a:t>Fifth level</a:t>
             </a:r>
-            <a:endParaRPr lang="en-US"/>
           </a:p>
         </p:txBody>
       </p:sp>
@@ -1299,38 +1304,37 @@
           <a:p>
             <a:pPr lvl="0"/>
             <a:r>
-              <a:rPr lang="en-US" smtClean="0"/>
+              <a:rPr lang="en-US"/>
               <a:t>Click to edit Master text styles</a:t>
             </a:r>
           </a:p>
           <a:p>
             <a:pPr lvl="1"/>
             <a:r>
-              <a:rPr lang="en-US" smtClean="0"/>
+              <a:rPr lang="en-US"/>
               <a:t>Second level</a:t>
             </a:r>
           </a:p>
           <a:p>
             <a:pPr lvl="2"/>
             <a:r>
-              <a:rPr lang="en-US" smtClean="0"/>
+              <a:rPr lang="en-US"/>
               <a:t>Third level</a:t>
             </a:r>
           </a:p>
           <a:p>
             <a:pPr lvl="3"/>
             <a:r>
-              <a:rPr lang="en-US" smtClean="0"/>
+              <a:rPr lang="en-US"/>
               <a:t>Fourth level</a:t>
             </a:r>
           </a:p>
           <a:p>
             <a:pPr lvl="4"/>
             <a:r>
-              <a:rPr lang="en-US" smtClean="0"/>
+              <a:rPr lang="en-US"/>
               <a:t>Fifth level</a:t>
             </a:r>
-            <a:endParaRPr lang="en-US"/>
           </a:p>
         </p:txBody>
       </p:sp>
@@ -1351,7 +1355,7 @@
           <a:p>
             <a:fld id="{5BCAD085-E8A6-8845-BD4E-CB4CCA059FC4}" type="datetimeFigureOut">
               <a:rPr lang="en-US" smtClean="0"/>
-              <a:t>1/27/13</a:t>
+              <a:t>7/10/26</a:t>
             </a:fld>
             <a:endParaRPr lang="en-US"/>
           </a:p>
@@ -1449,10 +1453,9 @@
           </a:lstStyle>
           <a:p>
             <a:r>
-              <a:rPr lang="en-US" smtClean="0"/>
+              <a:rPr lang="en-US"/>
               <a:t>Click to edit Master title style</a:t>
             </a:r>
-            <a:endParaRPr lang="en-US"/>
           </a:p>
         </p:txBody>
       </p:sp>
@@ -1515,7 +1518,7 @@
           <a:p>
             <a:pPr lvl="0"/>
             <a:r>
-              <a:rPr lang="en-US" smtClean="0"/>
+              <a:rPr lang="en-US"/>
               <a:t>Click to edit Master text styles</a:t>
             </a:r>
           </a:p>
@@ -1571,38 +1574,37 @@
           <a:p>
             <a:pPr lvl="0"/>
             <a:r>
-              <a:rPr lang="en-US" smtClean="0"/>
+              <a:rPr lang="en-US"/>
               <a:t>Click to edit Master text styles</a:t>
             </a:r>
           </a:p>
           <a:p>
             <a:pPr lvl="1"/>
             <a:r>
-              <a:rPr lang="en-US" smtClean="0"/>
+              <a:rPr lang="en-US"/>
               <a:t>Second level</a:t>
             </a:r>
           </a:p>
           <a:p>
             <a:pPr lvl="2"/>
             <a:r>
-              <a:rPr lang="en-US" smtClean="0"/>
+              <a:rPr lang="en-US"/>
               <a:t>Third level</a:t>
             </a:r>
           </a:p>
           <a:p>
             <a:pPr lvl="3"/>
             <a:r>
-              <a:rPr lang="en-US" smtClean="0"/>
+              <a:rPr lang="en-US"/>
               <a:t>Fourth level</a:t>
             </a:r>
           </a:p>
           <a:p>
             <a:pPr lvl="4"/>
             <a:r>
-              <a:rPr lang="en-US" smtClean="0"/>
+              <a:rPr lang="en-US"/>
               <a:t>Fifth level</a:t>
             </a:r>
-            <a:endParaRPr lang="en-US"/>
           </a:p>
         </p:txBody>
       </p:sp>
@@ -1665,7 +1667,7 @@
           <a:p>
             <a:pPr lvl="0"/>
             <a:r>
-              <a:rPr lang="en-US" smtClean="0"/>
+              <a:rPr lang="en-US"/>
               <a:t>Click to edit Master text styles</a:t>
             </a:r>
           </a:p>
@@ -1721,38 +1723,37 @@
           <a:p>
             <a:pPr lvl="0"/>
             <a:r>
-              <a:rPr lang="en-US" smtClean="0"/>
+              <a:rPr lang="en-US"/>
               <a:t>Click to edit Master text styles</a:t>
             </a:r>
           </a:p>
           <a:p>
             <a:pPr lvl="1"/>
             <a:r>
-              <a:rPr lang="en-US" smtClean="0"/>
+              <a:rPr lang="en-US"/>
               <a:t>Second level</a:t>
             </a:r>
           </a:p>
           <a:p>
             <a:pPr lvl="2"/>
             <a:r>
-              <a:rPr lang="en-US" smtClean="0"/>
+              <a:rPr lang="en-US"/>
               <a:t>Third level</a:t>
             </a:r>
           </a:p>
           <a:p>
             <a:pPr lvl="3"/>
             <a:r>
-              <a:rPr lang="en-US" smtClean="0"/>
+              <a:rPr lang="en-US"/>
               <a:t>Fourth level</a:t>
             </a:r>
           </a:p>
           <a:p>
             <a:pPr lvl="4"/>
             <a:r>
-              <a:rPr lang="en-US" smtClean="0"/>
+              <a:rPr lang="en-US"/>
               <a:t>Fifth level</a:t>
             </a:r>
-            <a:endParaRPr lang="en-US"/>
           </a:p>
         </p:txBody>
       </p:sp>
@@ -1773,7 +1774,7 @@
           <a:p>
             <a:fld id="{5BCAD085-E8A6-8845-BD4E-CB4CCA059FC4}" type="datetimeFigureOut">
               <a:rPr lang="en-US" smtClean="0"/>
-              <a:t>1/27/13</a:t>
+              <a:t>7/10/26</a:t>
             </a:fld>
             <a:endParaRPr lang="en-US"/>
           </a:p>
@@ -1867,10 +1868,9 @@
           <a:lstStyle/>
           <a:p>
             <a:r>
-              <a:rPr lang="en-US" smtClean="0"/>
+              <a:rPr lang="en-US"/>
               <a:t>Click to edit Master title style</a:t>
             </a:r>
-            <a:endParaRPr lang="en-US"/>
           </a:p>
         </p:txBody>
       </p:sp>
@@ -1891,7 +1891,7 @@
           <a:p>
             <a:fld id="{5BCAD085-E8A6-8845-BD4E-CB4CCA059FC4}" type="datetimeFigureOut">
               <a:rPr lang="en-US" smtClean="0"/>
-              <a:t>1/27/13</a:t>
+              <a:t>7/10/26</a:t>
             </a:fld>
             <a:endParaRPr lang="en-US"/>
           </a:p>
@@ -1986,7 +1986,7 @@
           <a:p>
             <a:fld id="{5BCAD085-E8A6-8845-BD4E-CB4CCA059FC4}" type="datetimeFigureOut">
               <a:rPr lang="en-US" smtClean="0"/>
-              <a:t>1/27/13</a:t>
+              <a:t>7/10/26</a:t>
             </a:fld>
             <a:endParaRPr lang="en-US"/>
           </a:p>
@@ -2089,10 +2089,9 @@
           </a:lstStyle>
           <a:p>
             <a:r>
-              <a:rPr lang="en-US" smtClean="0"/>
+              <a:rPr lang="en-US"/>
               <a:t>Click to edit Master title style</a:t>
             </a:r>
-            <a:endParaRPr lang="en-US"/>
           </a:p>
         </p:txBody>
       </p:sp>
@@ -2146,38 +2145,37 @@
           <a:p>
             <a:pPr lvl="0"/>
             <a:r>
-              <a:rPr lang="en-US" smtClean="0"/>
+              <a:rPr lang="en-US"/>
               <a:t>Click to edit Master text styles</a:t>
             </a:r>
           </a:p>
           <a:p>
             <a:pPr lvl="1"/>
             <a:r>
-              <a:rPr lang="en-US" smtClean="0"/>
+              <a:rPr lang="en-US"/>
               <a:t>Second level</a:t>
             </a:r>
           </a:p>
           <a:p>
             <a:pPr lvl="2"/>
             <a:r>
-              <a:rPr lang="en-US" smtClean="0"/>
+              <a:rPr lang="en-US"/>
               <a:t>Third level</a:t>
             </a:r>
           </a:p>
           <a:p>
             <a:pPr lvl="3"/>
             <a:r>
-              <a:rPr lang="en-US" smtClean="0"/>
+              <a:rPr lang="en-US"/>
               <a:t>Fourth level</a:t>
             </a:r>
           </a:p>
           <a:p>
             <a:pPr lvl="4"/>
             <a:r>
-              <a:rPr lang="en-US" smtClean="0"/>
+              <a:rPr lang="en-US"/>
               <a:t>Fifth level</a:t>
             </a:r>
-            <a:endParaRPr lang="en-US"/>
           </a:p>
         </p:txBody>
       </p:sp>
@@ -2240,7 +2238,7 @@
           <a:p>
             <a:pPr lvl="0"/>
             <a:r>
-              <a:rPr lang="en-US" smtClean="0"/>
+              <a:rPr lang="en-US"/>
               <a:t>Click to edit Master text styles</a:t>
             </a:r>
           </a:p>
@@ -2263,7 +2261,7 @@
           <a:p>
             <a:fld id="{5BCAD085-E8A6-8845-BD4E-CB4CCA059FC4}" type="datetimeFigureOut">
               <a:rPr lang="en-US" smtClean="0"/>
-              <a:t>1/27/13</a:t>
+              <a:t>7/10/26</a:t>
             </a:fld>
             <a:endParaRPr lang="en-US"/>
           </a:p>
@@ -2366,10 +2364,9 @@
           </a:lstStyle>
           <a:p>
             <a:r>
-              <a:rPr lang="en-US" smtClean="0"/>
+              <a:rPr lang="en-US"/>
               <a:t>Click to edit Master title style</a:t>
             </a:r>
-            <a:endParaRPr lang="en-US"/>
           </a:p>
         </p:txBody>
       </p:sp>
@@ -2493,7 +2490,7 @@
           <a:p>
             <a:pPr lvl="0"/>
             <a:r>
-              <a:rPr lang="en-US" smtClean="0"/>
+              <a:rPr lang="en-US"/>
               <a:t>Click to edit Master text styles</a:t>
             </a:r>
           </a:p>
@@ -2516,7 +2513,7 @@
           <a:p>
             <a:fld id="{5BCAD085-E8A6-8845-BD4E-CB4CCA059FC4}" type="datetimeFigureOut">
               <a:rPr lang="en-US" smtClean="0"/>
-              <a:t>1/27/13</a:t>
+              <a:t>7/10/26</a:t>
             </a:fld>
             <a:endParaRPr lang="en-US"/>
           </a:p>
@@ -2625,10 +2622,9 @@
           <a:lstStyle/>
           <a:p>
             <a:r>
-              <a:rPr lang="en-US" smtClean="0"/>
+              <a:rPr lang="en-US"/>
               <a:t>Click to edit Master title style</a:t>
             </a:r>
-            <a:endParaRPr lang="en-US"/>
           </a:p>
         </p:txBody>
       </p:sp>
@@ -2659,38 +2655,37 @@
           <a:p>
             <a:pPr lvl="0"/>
             <a:r>
-              <a:rPr lang="en-US" smtClean="0"/>
+              <a:rPr lang="en-US"/>
               <a:t>Click to edit Master text styles</a:t>
             </a:r>
           </a:p>
           <a:p>
             <a:pPr lvl="1"/>
             <a:r>
-              <a:rPr lang="en-US" smtClean="0"/>
+              <a:rPr lang="en-US"/>
               <a:t>Second level</a:t>
             </a:r>
           </a:p>
           <a:p>
             <a:pPr lvl="2"/>
             <a:r>
-              <a:rPr lang="en-US" smtClean="0"/>
+              <a:rPr lang="en-US"/>
               <a:t>Third level</a:t>
             </a:r>
           </a:p>
           <a:p>
             <a:pPr lvl="3"/>
             <a:r>
-              <a:rPr lang="en-US" smtClean="0"/>
+              <a:rPr lang="en-US"/>
               <a:t>Fourth level</a:t>
             </a:r>
           </a:p>
           <a:p>
             <a:pPr lvl="4"/>
             <a:r>
-              <a:rPr lang="en-US" smtClean="0"/>
+              <a:rPr lang="en-US"/>
               <a:t>Fifth level</a:t>
             </a:r>
-            <a:endParaRPr lang="en-US"/>
           </a:p>
         </p:txBody>
       </p:sp>
@@ -2729,7 +2724,7 @@
           <a:p>
             <a:fld id="{5BCAD085-E8A6-8845-BD4E-CB4CCA059FC4}" type="datetimeFigureOut">
               <a:rPr lang="en-US" smtClean="0"/>
-              <a:t>1/27/13</a:t>
+              <a:t>7/10/26</a:t>
             </a:fld>
             <a:endParaRPr lang="en-US"/>
           </a:p>
@@ -3088,7 +3083,7 @@
 </file>
 
 <file path=ppt/slides/slide1.xml><?xml version="1.0" encoding="utf-8"?>
-<p:sld xmlns:a="http://schemas.openxmlformats.org/drawingml/2006/main" xmlns:p="http://schemas.openxmlformats.org/presentationml/2006/main" xmlns:r="http://schemas.openxmlformats.org/officeDocument/2006/relationships">
+<p:sld xmlns:a="http://schemas.openxmlformats.org/drawingml/2006/main" xmlns:r="http://schemas.openxmlformats.org/officeDocument/2006/relationships" xmlns:p="http://schemas.openxmlformats.org/presentationml/2006/main">
   <p:cSld>
     <p:bg>
       <p:bgPr>
@@ -3104,7 +3099,14 @@
         <p:cNvGrpSpPr/>
         <p:nvPr/>
       </p:nvGrpSpPr>
-      <p:grpSpPr/>
+      <p:grpSpPr>
+        <a:xfrm>
+          <a:off x="0" y="0"/>
+          <a:ext cx="0" cy="0"/>
+          <a:chOff x="0" y="0"/>
+          <a:chExt cx="0" cy="0"/>
+        </a:xfrm>
+      </p:grpSpPr>
       <p:sp>
         <p:nvSpPr>
           <p:cNvPr id="2" name="Rectangle 1"/>
@@ -3146,6 +3148,7 @@
           <a:lstStyle/>
           <a:p>
             <a:pPr algn="ctr"/>
+            <a:endParaRPr/>
           </a:p>
         </p:txBody>
       </p:sp>
@@ -3190,6 +3193,7 @@
           <a:lstStyle/>
           <a:p>
             <a:pPr algn="ctr"/>
+            <a:endParaRPr/>
           </a:p>
         </p:txBody>
       </p:sp>
@@ -3359,6 +3363,7 @@
           <a:lstStyle/>
           <a:p>
             <a:pPr algn="ctr"/>
+            <a:endParaRPr/>
           </a:p>
         </p:txBody>
       </p:sp>
@@ -3711,7 +3716,7 @@
 </file>
 
 <file path=ppt/slides/slide10.xml><?xml version="1.0" encoding="utf-8"?>
-<p:sld xmlns:a="http://schemas.openxmlformats.org/drawingml/2006/main" xmlns:p="http://schemas.openxmlformats.org/presentationml/2006/main" xmlns:r="http://schemas.openxmlformats.org/officeDocument/2006/relationships">
+<p:sld xmlns:a="http://schemas.openxmlformats.org/drawingml/2006/main" xmlns:r="http://schemas.openxmlformats.org/officeDocument/2006/relationships" xmlns:p="http://schemas.openxmlformats.org/presentationml/2006/main">
   <p:cSld>
     <p:bg>
       <p:bgPr>
@@ -3727,7 +3732,14 @@
         <p:cNvGrpSpPr/>
         <p:nvPr/>
       </p:nvGrpSpPr>
-      <p:grpSpPr/>
+      <p:grpSpPr>
+        <a:xfrm>
+          <a:off x="0" y="0"/>
+          <a:ext cx="0" cy="0"/>
+          <a:chOff x="0" y="0"/>
+          <a:chExt cx="0" cy="0"/>
+        </a:xfrm>
+      </p:grpSpPr>
       <p:sp>
         <p:nvSpPr>
           <p:cNvPr id="2" name="Rectangle 1"/>
@@ -3769,6 +3781,7 @@
           <a:lstStyle/>
           <a:p>
             <a:pPr algn="ctr"/>
+            <a:endParaRPr/>
           </a:p>
         </p:txBody>
       </p:sp>
@@ -3813,6 +3826,7 @@
           <a:lstStyle/>
           <a:p>
             <a:pPr algn="ctr"/>
+            <a:endParaRPr/>
           </a:p>
         </p:txBody>
       </p:sp>
@@ -4065,7 +4079,7 @@
 </file>
 
 <file path=ppt/slides/slide2.xml><?xml version="1.0" encoding="utf-8"?>
-<p:sld xmlns:a="http://schemas.openxmlformats.org/drawingml/2006/main" xmlns:p="http://schemas.openxmlformats.org/presentationml/2006/main" xmlns:r="http://schemas.openxmlformats.org/officeDocument/2006/relationships">
+<p:sld xmlns:a="http://schemas.openxmlformats.org/drawingml/2006/main" xmlns:r="http://schemas.openxmlformats.org/officeDocument/2006/relationships" xmlns:p="http://schemas.openxmlformats.org/presentationml/2006/main">
   <p:cSld>
     <p:bg>
       <p:bgPr>
@@ -4081,7 +4095,14 @@
         <p:cNvGrpSpPr/>
         <p:nvPr/>
       </p:nvGrpSpPr>
-      <p:grpSpPr/>
+      <p:grpSpPr>
+        <a:xfrm>
+          <a:off x="0" y="0"/>
+          <a:ext cx="0" cy="0"/>
+          <a:chOff x="0" y="0"/>
+          <a:chExt cx="0" cy="0"/>
+        </a:xfrm>
+      </p:grpSpPr>
       <p:sp>
         <p:nvSpPr>
           <p:cNvPr id="2" name="TextBox 1"/>
@@ -4193,6 +4214,7 @@
           <a:lstStyle/>
           <a:p>
             <a:pPr algn="ctr"/>
+            <a:endParaRPr/>
           </a:p>
         </p:txBody>
       </p:sp>
@@ -4410,6 +4432,7 @@
           <a:lstStyle/>
           <a:p>
             <a:pPr algn="ctr"/>
+            <a:endParaRPr/>
           </a:p>
         </p:txBody>
       </p:sp>
@@ -4627,7 +4650,7 @@
 </file>
 
 <file path=ppt/slides/slide3.xml><?xml version="1.0" encoding="utf-8"?>
-<p:sld xmlns:a="http://schemas.openxmlformats.org/drawingml/2006/main" xmlns:p="http://schemas.openxmlformats.org/presentationml/2006/main" xmlns:r="http://schemas.openxmlformats.org/officeDocument/2006/relationships">
+<p:sld xmlns:a="http://schemas.openxmlformats.org/drawingml/2006/main" xmlns:r="http://schemas.openxmlformats.org/officeDocument/2006/relationships" xmlns:p="http://schemas.openxmlformats.org/presentationml/2006/main">
   <p:cSld>
     <p:bg>
       <p:bgPr>
@@ -4643,7 +4666,14 @@
         <p:cNvGrpSpPr/>
         <p:nvPr/>
       </p:nvGrpSpPr>
-      <p:grpSpPr/>
+      <p:grpSpPr>
+        <a:xfrm>
+          <a:off x="0" y="0"/>
+          <a:ext cx="0" cy="0"/>
+          <a:chOff x="0" y="0"/>
+          <a:chExt cx="0" cy="0"/>
+        </a:xfrm>
+      </p:grpSpPr>
       <p:sp>
         <p:nvSpPr>
           <p:cNvPr id="2" name="TextBox 1"/>
@@ -4755,6 +4785,7 @@
           <a:lstStyle/>
           <a:p>
             <a:pPr algn="ctr"/>
+            <a:endParaRPr/>
           </a:p>
         </p:txBody>
       </p:sp>
@@ -4766,7 +4797,7 @@
         </p:nvSpPr>
         <p:spPr>
           <a:xfrm>
-            <a:off x="640080" y="1691640"/>
+            <a:off x="640080" y="1545336"/>
             <a:ext cx="10881360" cy="457200"/>
           </a:xfrm>
           <a:prstGeom prst="rect">
@@ -4782,7 +4813,7 @@
           <a:p>
             <a:pPr algn="l"/>
             <a:r>
-              <a:rPr sz="1450" b="0" i="1">
+              <a:rPr sz="1450" b="0" i="1" dirty="0">
                 <a:solidFill>
                   <a:srgbClr val="52514E"/>
                 </a:solidFill>
@@ -4836,6 +4867,7 @@
           <a:lstStyle/>
           <a:p>
             <a:pPr algn="ctr"/>
+            <a:endParaRPr/>
           </a:p>
         </p:txBody>
       </p:sp>
@@ -4880,6 +4912,7 @@
           <a:lstStyle/>
           <a:p>
             <a:pPr algn="ctr"/>
+            <a:endParaRPr/>
           </a:p>
         </p:txBody>
       </p:sp>
@@ -5124,6 +5157,7 @@
           <a:lstStyle/>
           <a:p>
             <a:pPr algn="ctr"/>
+            <a:endParaRPr/>
           </a:p>
         </p:txBody>
       </p:sp>
@@ -5168,6 +5202,7 @@
           <a:lstStyle/>
           <a:p>
             <a:pPr algn="ctr"/>
+            <a:endParaRPr/>
           </a:p>
         </p:txBody>
       </p:sp>
@@ -5412,6 +5447,7 @@
           <a:lstStyle/>
           <a:p>
             <a:pPr algn="ctr"/>
+            <a:endParaRPr/>
           </a:p>
         </p:txBody>
       </p:sp>
@@ -5456,6 +5492,7 @@
           <a:lstStyle/>
           <a:p>
             <a:pPr algn="ctr"/>
+            <a:endParaRPr/>
           </a:p>
         </p:txBody>
       </p:sp>
@@ -5689,6 +5726,80 @@
               </a:rPr>
               <a:t>3</a:t>
             </a:r>
+          </a:p>
+        </p:txBody>
+      </p:sp>
+      <p:sp>
+        <p:nvSpPr>
+          <p:cNvPr id="19" name="TextBox 18">
+            <a:extLst>
+              <a:ext uri="{FF2B5EF4-FFF2-40B4-BE49-F238E27FC236}">
+                <a16:creationId xmlns:a16="http://schemas.microsoft.com/office/drawing/2014/main" id="{44B57CDD-F6E5-526A-6205-BB898AD9919C}"/>
+              </a:ext>
+            </a:extLst>
+          </p:cNvPr>
+          <p:cNvSpPr txBox="1"/>
+          <p:nvPr/>
+        </p:nvSpPr>
+        <p:spPr>
+          <a:xfrm>
+            <a:off x="640080" y="1796796"/>
+            <a:ext cx="10881360" cy="315471"/>
+          </a:xfrm>
+          <a:prstGeom prst="rect">
+            <a:avLst/>
+          </a:prstGeom>
+          <a:noFill/>
+        </p:spPr>
+        <p:txBody>
+          <a:bodyPr wrap="square" anchor="t">
+            <a:spAutoFit/>
+          </a:bodyPr>
+          <a:lstStyle/>
+          <a:p>
+            <a:pPr algn="l"/>
+            <a:r>
+              <a:rPr lang="en-US" sz="1450" b="0" i="1" dirty="0">
+                <a:solidFill>
+                  <a:srgbClr val="52514E"/>
+                </a:solidFill>
+                <a:latin typeface="Calibri"/>
+              </a:rPr>
+              <a:t>Tech Stack :  React with Tailwind for Frontend, </a:t>
+            </a:r>
+            <a:r>
+              <a:rPr lang="en-US" sz="1450" b="0" i="1" dirty="0" err="1">
+                <a:solidFill>
+                  <a:srgbClr val="52514E"/>
+                </a:solidFill>
+                <a:latin typeface="Calibri"/>
+              </a:rPr>
+              <a:t>Express.js</a:t>
+            </a:r>
+            <a:r>
+              <a:rPr lang="en-US" sz="1450" b="0" i="1" dirty="0">
+                <a:solidFill>
+                  <a:srgbClr val="52514E"/>
+                </a:solidFill>
+                <a:latin typeface="Calibri"/>
+              </a:rPr>
+              <a:t> in Backend, Mongo </a:t>
+            </a:r>
+            <a:r>
+              <a:rPr lang="en-US" sz="1450" i="1" dirty="0">
+                <a:solidFill>
+                  <a:srgbClr val="52514E"/>
+                </a:solidFill>
+                <a:latin typeface="Calibri"/>
+              </a:rPr>
+              <a:t>as Database, JWT Token for Authentication etc. </a:t>
+            </a:r>
+            <a:endParaRPr sz="1450" b="0" i="1" dirty="0">
+              <a:solidFill>
+                <a:srgbClr val="52514E"/>
+              </a:solidFill>
+              <a:latin typeface="Calibri"/>
+            </a:endParaRPr>
           </a:p>
         </p:txBody>
       </p:sp>
@@ -5701,7 +5812,7 @@
 </file>
 
 <file path=ppt/slides/slide4.xml><?xml version="1.0" encoding="utf-8"?>
-<p:sld xmlns:a="http://schemas.openxmlformats.org/drawingml/2006/main" xmlns:p="http://schemas.openxmlformats.org/presentationml/2006/main" xmlns:r="http://schemas.openxmlformats.org/officeDocument/2006/relationships">
+<p:sld xmlns:a="http://schemas.openxmlformats.org/drawingml/2006/main" xmlns:r="http://schemas.openxmlformats.org/officeDocument/2006/relationships" xmlns:p="http://schemas.openxmlformats.org/presentationml/2006/main">
   <p:cSld>
     <p:bg>
       <p:bgPr>
@@ -5717,7 +5828,14 @@
         <p:cNvGrpSpPr/>
         <p:nvPr/>
       </p:nvGrpSpPr>
-      <p:grpSpPr/>
+      <p:grpSpPr>
+        <a:xfrm>
+          <a:off x="0" y="0"/>
+          <a:ext cx="0" cy="0"/>
+          <a:chOff x="0" y="0"/>
+          <a:chExt cx="0" cy="0"/>
+        </a:xfrm>
+      </p:grpSpPr>
       <p:sp>
         <p:nvSpPr>
           <p:cNvPr id="2" name="TextBox 1"/>
@@ -5829,6 +5947,7 @@
           <a:lstStyle/>
           <a:p>
             <a:pPr algn="ctr"/>
+            <a:endParaRPr/>
           </a:p>
         </p:txBody>
       </p:sp>
@@ -5875,6 +5994,7 @@
           <a:lstStyle/>
           <a:p>
             <a:pPr algn="ctr"/>
+            <a:endParaRPr/>
           </a:p>
         </p:txBody>
       </p:sp>
@@ -5915,7 +6035,7 @@
           </a:fontRef>
         </p:style>
         <p:txBody>
-          <a:bodyPr rtlCol="0" anchor="ctr" lIns="0" rIns="0" tIns="0" bIns="0"/>
+          <a:bodyPr lIns="0" tIns="0" rIns="0" bIns="0" rtlCol="0" anchor="ctr"/>
           <a:lstStyle/>
           <a:p>
             <a:pPr algn="ctr"/>
@@ -6041,6 +6161,7 @@
           <a:lstStyle/>
           <a:p>
             <a:pPr algn="ctr"/>
+            <a:endParaRPr/>
           </a:p>
         </p:txBody>
       </p:sp>
@@ -6087,6 +6208,7 @@
           <a:lstStyle/>
           <a:p>
             <a:pPr algn="ctr"/>
+            <a:endParaRPr/>
           </a:p>
         </p:txBody>
       </p:sp>
@@ -6127,7 +6249,7 @@
           </a:fontRef>
         </p:style>
         <p:txBody>
-          <a:bodyPr rtlCol="0" anchor="ctr" lIns="0" rIns="0" tIns="0" bIns="0"/>
+          <a:bodyPr lIns="0" tIns="0" rIns="0" bIns="0" rtlCol="0" anchor="ctr"/>
           <a:lstStyle/>
           <a:p>
             <a:pPr algn="ctr"/>
@@ -6253,6 +6375,7 @@
           <a:lstStyle/>
           <a:p>
             <a:pPr algn="ctr"/>
+            <a:endParaRPr/>
           </a:p>
         </p:txBody>
       </p:sp>
@@ -6299,6 +6422,7 @@
           <a:lstStyle/>
           <a:p>
             <a:pPr algn="ctr"/>
+            <a:endParaRPr/>
           </a:p>
         </p:txBody>
       </p:sp>
@@ -6339,7 +6463,7 @@
           </a:fontRef>
         </p:style>
         <p:txBody>
-          <a:bodyPr rtlCol="0" anchor="ctr" lIns="0" rIns="0" tIns="0" bIns="0"/>
+          <a:bodyPr lIns="0" tIns="0" rIns="0" bIns="0" rtlCol="0" anchor="ctr"/>
           <a:lstStyle/>
           <a:p>
             <a:pPr algn="ctr"/>
@@ -6465,6 +6589,7 @@
           <a:lstStyle/>
           <a:p>
             <a:pPr algn="ctr"/>
+            <a:endParaRPr/>
           </a:p>
         </p:txBody>
       </p:sp>
@@ -6511,6 +6636,7 @@
           <a:lstStyle/>
           <a:p>
             <a:pPr algn="ctr"/>
+            <a:endParaRPr/>
           </a:p>
         </p:txBody>
       </p:sp>
@@ -6551,7 +6677,7 @@
           </a:fontRef>
         </p:style>
         <p:txBody>
-          <a:bodyPr rtlCol="0" anchor="ctr" lIns="0" rIns="0" tIns="0" bIns="0"/>
+          <a:bodyPr lIns="0" tIns="0" rIns="0" bIns="0" rtlCol="0" anchor="ctr"/>
           <a:lstStyle/>
           <a:p>
             <a:pPr algn="ctr"/>
@@ -6677,6 +6803,7 @@
           <a:lstStyle/>
           <a:p>
             <a:pPr algn="ctr"/>
+            <a:endParaRPr/>
           </a:p>
         </p:txBody>
       </p:sp>
@@ -6723,6 +6850,7 @@
           <a:lstStyle/>
           <a:p>
             <a:pPr algn="ctr"/>
+            <a:endParaRPr/>
           </a:p>
         </p:txBody>
       </p:sp>
@@ -6763,7 +6891,7 @@
           </a:fontRef>
         </p:style>
         <p:txBody>
-          <a:bodyPr rtlCol="0" anchor="ctr" lIns="0" rIns="0" tIns="0" bIns="0"/>
+          <a:bodyPr lIns="0" tIns="0" rIns="0" bIns="0" rtlCol="0" anchor="ctr"/>
           <a:lstStyle/>
           <a:p>
             <a:pPr algn="ctr"/>
@@ -6889,6 +7017,7 @@
           <a:lstStyle/>
           <a:p>
             <a:pPr algn="ctr"/>
+            <a:endParaRPr/>
           </a:p>
         </p:txBody>
       </p:sp>
@@ -6935,6 +7064,7 @@
           <a:lstStyle/>
           <a:p>
             <a:pPr algn="ctr"/>
+            <a:endParaRPr/>
           </a:p>
         </p:txBody>
       </p:sp>
@@ -6975,7 +7105,7 @@
           </a:fontRef>
         </p:style>
         <p:txBody>
-          <a:bodyPr rtlCol="0" anchor="ctr" lIns="0" rIns="0" tIns="0" bIns="0"/>
+          <a:bodyPr lIns="0" tIns="0" rIns="0" bIns="0" rtlCol="0" anchor="ctr"/>
           <a:lstStyle/>
           <a:p>
             <a:pPr algn="ctr"/>
@@ -7103,6 +7233,7 @@
           <a:lstStyle/>
           <a:p>
             <a:pPr algn="ctr"/>
+            <a:endParaRPr/>
           </a:p>
         </p:txBody>
       </p:sp>
@@ -7282,7 +7413,7 @@
 </file>
 
 <file path=ppt/slides/slide5.xml><?xml version="1.0" encoding="utf-8"?>
-<p:sld xmlns:a="http://schemas.openxmlformats.org/drawingml/2006/main" xmlns:p="http://schemas.openxmlformats.org/presentationml/2006/main" xmlns:r="http://schemas.openxmlformats.org/officeDocument/2006/relationships">
+<p:sld xmlns:a="http://schemas.openxmlformats.org/drawingml/2006/main" xmlns:r="http://schemas.openxmlformats.org/officeDocument/2006/relationships" xmlns:p="http://schemas.openxmlformats.org/presentationml/2006/main">
   <p:cSld>
     <p:bg>
       <p:bgPr>
@@ -7298,7 +7429,14 @@
         <p:cNvGrpSpPr/>
         <p:nvPr/>
       </p:nvGrpSpPr>
-      <p:grpSpPr/>
+      <p:grpSpPr>
+        <a:xfrm>
+          <a:off x="0" y="0"/>
+          <a:ext cx="0" cy="0"/>
+          <a:chOff x="0" y="0"/>
+          <a:chExt cx="0" cy="0"/>
+        </a:xfrm>
+      </p:grpSpPr>
       <p:sp>
         <p:nvSpPr>
           <p:cNvPr id="2" name="TextBox 1"/>
@@ -7410,6 +7548,7 @@
           <a:lstStyle/>
           <a:p>
             <a:pPr algn="ctr"/>
+            <a:endParaRPr/>
           </a:p>
         </p:txBody>
       </p:sp>
@@ -7660,6 +7799,7 @@
           <a:lstStyle/>
           <a:p>
             <a:pPr algn="ctr"/>
+            <a:endParaRPr/>
           </a:p>
         </p:txBody>
       </p:sp>
@@ -7704,6 +7844,7 @@
           <a:lstStyle/>
           <a:p>
             <a:pPr algn="ctr"/>
+            <a:endParaRPr/>
           </a:p>
         </p:txBody>
       </p:sp>
@@ -7783,6 +7924,7 @@
           <a:lstStyle/>
           <a:p>
             <a:pPr algn="ctr"/>
+            <a:endParaRPr/>
           </a:p>
         </p:txBody>
       </p:sp>
@@ -7897,6 +8039,7 @@
           <a:lstStyle/>
           <a:p>
             <a:pPr algn="ctr"/>
+            <a:endParaRPr/>
           </a:p>
         </p:txBody>
       </p:sp>
@@ -8011,6 +8154,7 @@
           <a:lstStyle/>
           <a:p>
             <a:pPr algn="ctr"/>
+            <a:endParaRPr/>
           </a:p>
         </p:txBody>
       </p:sp>
@@ -8125,6 +8269,7 @@
           <a:lstStyle/>
           <a:p>
             <a:pPr algn="ctr"/>
+            <a:endParaRPr/>
           </a:p>
         </p:txBody>
       </p:sp>
@@ -8239,6 +8384,7 @@
           <a:lstStyle/>
           <a:p>
             <a:pPr algn="ctr"/>
+            <a:endParaRPr/>
           </a:p>
         </p:txBody>
       </p:sp>
@@ -8353,6 +8499,7 @@
           <a:lstStyle/>
           <a:p>
             <a:pPr algn="ctr"/>
+            <a:endParaRPr/>
           </a:p>
         </p:txBody>
       </p:sp>
@@ -8470,7 +8617,7 @@
 </file>
 
 <file path=ppt/slides/slide6.xml><?xml version="1.0" encoding="utf-8"?>
-<p:sld xmlns:a="http://schemas.openxmlformats.org/drawingml/2006/main" xmlns:p="http://schemas.openxmlformats.org/presentationml/2006/main" xmlns:r="http://schemas.openxmlformats.org/officeDocument/2006/relationships">
+<p:sld xmlns:a="http://schemas.openxmlformats.org/drawingml/2006/main" xmlns:r="http://schemas.openxmlformats.org/officeDocument/2006/relationships" xmlns:p="http://schemas.openxmlformats.org/presentationml/2006/main">
   <p:cSld>
     <p:bg>
       <p:bgPr>
@@ -8486,7 +8633,14 @@
         <p:cNvGrpSpPr/>
         <p:nvPr/>
       </p:nvGrpSpPr>
-      <p:grpSpPr/>
+      <p:grpSpPr>
+        <a:xfrm>
+          <a:off x="0" y="0"/>
+          <a:ext cx="0" cy="0"/>
+          <a:chOff x="0" y="0"/>
+          <a:chExt cx="0" cy="0"/>
+        </a:xfrm>
+      </p:grpSpPr>
       <p:sp>
         <p:nvSpPr>
           <p:cNvPr id="2" name="TextBox 1"/>
@@ -8598,6 +8752,7 @@
           <a:lstStyle/>
           <a:p>
             <a:pPr algn="ctr"/>
+            <a:endParaRPr/>
           </a:p>
         </p:txBody>
       </p:sp>
@@ -8837,7 +8992,7 @@
 </file>
 
 <file path=ppt/slides/slide7.xml><?xml version="1.0" encoding="utf-8"?>
-<p:sld xmlns:a="http://schemas.openxmlformats.org/drawingml/2006/main" xmlns:p="http://schemas.openxmlformats.org/presentationml/2006/main" xmlns:r="http://schemas.openxmlformats.org/officeDocument/2006/relationships">
+<p:sld xmlns:a="http://schemas.openxmlformats.org/drawingml/2006/main" xmlns:r="http://schemas.openxmlformats.org/officeDocument/2006/relationships" xmlns:p="http://schemas.openxmlformats.org/presentationml/2006/main">
   <p:cSld>
     <p:bg>
       <p:bgPr>
@@ -8853,7 +9008,14 @@
         <p:cNvGrpSpPr/>
         <p:nvPr/>
       </p:nvGrpSpPr>
-      <p:grpSpPr/>
+      <p:grpSpPr>
+        <a:xfrm>
+          <a:off x="0" y="0"/>
+          <a:ext cx="0" cy="0"/>
+          <a:chOff x="0" y="0"/>
+          <a:chExt cx="0" cy="0"/>
+        </a:xfrm>
+      </p:grpSpPr>
       <p:sp>
         <p:nvSpPr>
           <p:cNvPr id="2" name="TextBox 1"/>
@@ -8965,6 +9127,7 @@
           <a:lstStyle/>
           <a:p>
             <a:pPr algn="ctr"/>
+            <a:endParaRPr/>
           </a:p>
         </p:txBody>
       </p:sp>
@@ -9011,6 +9174,7 @@
           <a:lstStyle/>
           <a:p>
             <a:pPr algn="ctr"/>
+            <a:endParaRPr/>
           </a:p>
         </p:txBody>
       </p:sp>
@@ -9053,7 +9217,7 @@
           </a:fontRef>
         </p:style>
         <p:txBody>
-          <a:bodyPr rtlCol="0" anchor="ctr" wrap="none" lIns="50800" rIns="50800" tIns="25400" bIns="25400"/>
+          <a:bodyPr wrap="none" lIns="50800" tIns="25400" rIns="50800" bIns="25400" rtlCol="0" anchor="ctr"/>
           <a:lstStyle/>
           <a:p>
             <a:pPr algn="ctr"/>
@@ -9400,6 +9564,7 @@
           <a:lstStyle/>
           <a:p>
             <a:pPr algn="ctr"/>
+            <a:endParaRPr/>
           </a:p>
         </p:txBody>
       </p:sp>
@@ -9653,7 +9818,7 @@
 </file>
 
 <file path=ppt/slides/slide8.xml><?xml version="1.0" encoding="utf-8"?>
-<p:sld xmlns:a="http://schemas.openxmlformats.org/drawingml/2006/main" xmlns:p="http://schemas.openxmlformats.org/presentationml/2006/main" xmlns:r="http://schemas.openxmlformats.org/officeDocument/2006/relationships">
+<p:sld xmlns:a="http://schemas.openxmlformats.org/drawingml/2006/main" xmlns:r="http://schemas.openxmlformats.org/officeDocument/2006/relationships" xmlns:p="http://schemas.openxmlformats.org/presentationml/2006/main">
   <p:cSld>
     <p:bg>
       <p:bgPr>
@@ -9669,7 +9834,14 @@
         <p:cNvGrpSpPr/>
         <p:nvPr/>
       </p:nvGrpSpPr>
-      <p:grpSpPr/>
+      <p:grpSpPr>
+        <a:xfrm>
+          <a:off x="0" y="0"/>
+          <a:ext cx="0" cy="0"/>
+          <a:chOff x="0" y="0"/>
+          <a:chExt cx="0" cy="0"/>
+        </a:xfrm>
+      </p:grpSpPr>
       <p:sp>
         <p:nvSpPr>
           <p:cNvPr id="2" name="TextBox 1"/>
@@ -9781,6 +9953,7 @@
           <a:lstStyle/>
           <a:p>
             <a:pPr algn="ctr"/>
+            <a:endParaRPr/>
           </a:p>
         </p:txBody>
       </p:sp>
@@ -10036,7 +10209,7 @@
 </file>
 
 <file path=ppt/slides/slide9.xml><?xml version="1.0" encoding="utf-8"?>
-<p:sld xmlns:a="http://schemas.openxmlformats.org/drawingml/2006/main" xmlns:p="http://schemas.openxmlformats.org/presentationml/2006/main" xmlns:r="http://schemas.openxmlformats.org/officeDocument/2006/relationships">
+<p:sld xmlns:a="http://schemas.openxmlformats.org/drawingml/2006/main" xmlns:r="http://schemas.openxmlformats.org/officeDocument/2006/relationships" xmlns:p="http://schemas.openxmlformats.org/presentationml/2006/main">
   <p:cSld>
     <p:bg>
       <p:bgPr>
@@ -10052,7 +10225,14 @@
         <p:cNvGrpSpPr/>
         <p:nvPr/>
       </p:nvGrpSpPr>
-      <p:grpSpPr/>
+      <p:grpSpPr>
+        <a:xfrm>
+          <a:off x="0" y="0"/>
+          <a:ext cx="0" cy="0"/>
+          <a:chOff x="0" y="0"/>
+          <a:chExt cx="0" cy="0"/>
+        </a:xfrm>
+      </p:grpSpPr>
       <p:sp>
         <p:nvSpPr>
           <p:cNvPr id="2" name="TextBox 1"/>
@@ -10164,6 +10344,7 @@
           <a:lstStyle/>
           <a:p>
             <a:pPr algn="ctr"/>
+            <a:endParaRPr/>
           </a:p>
         </p:txBody>
       </p:sp>
@@ -10210,6 +10391,7 @@
           <a:lstStyle/>
           <a:p>
             <a:pPr algn="ctr"/>
+            <a:endParaRPr/>
           </a:p>
         </p:txBody>
       </p:sp>
@@ -10254,6 +10436,7 @@
           <a:lstStyle/>
           <a:p>
             <a:pPr algn="ctr"/>
+            <a:endParaRPr/>
           </a:p>
         </p:txBody>
       </p:sp>
@@ -10370,6 +10553,7 @@
           <a:lstStyle/>
           <a:p>
             <a:pPr algn="ctr"/>
+            <a:endParaRPr/>
           </a:p>
         </p:txBody>
       </p:sp>
@@ -10414,6 +10598,7 @@
           <a:lstStyle/>
           <a:p>
             <a:pPr algn="ctr"/>
+            <a:endParaRPr/>
           </a:p>
         </p:txBody>
       </p:sp>
@@ -10530,6 +10715,7 @@
           <a:lstStyle/>
           <a:p>
             <a:pPr algn="ctr"/>
+            <a:endParaRPr/>
           </a:p>
         </p:txBody>
       </p:sp>
@@ -10574,6 +10760,7 @@
           <a:lstStyle/>
           <a:p>
             <a:pPr algn="ctr"/>
+            <a:endParaRPr/>
           </a:p>
         </p:txBody>
       </p:sp>
@@ -10690,6 +10877,7 @@
           <a:lstStyle/>
           <a:p>
             <a:pPr algn="ctr"/>
+            <a:endParaRPr/>
           </a:p>
         </p:txBody>
       </p:sp>
@@ -10734,6 +10922,7 @@
           <a:lstStyle/>
           <a:p>
             <a:pPr algn="ctr"/>
+            <a:endParaRPr/>
           </a:p>
         </p:txBody>
       </p:sp>
@@ -10850,6 +11039,7 @@
           <a:lstStyle/>
           <a:p>
             <a:pPr algn="ctr"/>
+            <a:endParaRPr/>
           </a:p>
         </p:txBody>
       </p:sp>
@@ -10894,6 +11084,7 @@
           <a:lstStyle/>
           <a:p>
             <a:pPr algn="ctr"/>
+            <a:endParaRPr/>
           </a:p>
         </p:txBody>
       </p:sp>
